--- a/manually_labeled_process .pptx
+++ b/manually_labeled_process .pptx
@@ -304,7 +304,7 @@
           <a:p>
             <a:fld id="{4E7438E1-117D-44FB-AC24-B79D899BA877}" type="datetimeFigureOut">
               <a:rPr lang="he-IL" smtClean="0"/>
-              <a:t>כ"ז.אייר.תשפ"ו</a:t>
+              <a:t>ט'.סיון.תשפ"ו</a:t>
             </a:fld>
             <a:endParaRPr lang="he-IL"/>
           </a:p>
@@ -467,7 +467,7 @@
           <a:p>
             <a:fld id="{4E7438E1-117D-44FB-AC24-B79D899BA877}" type="datetimeFigureOut">
               <a:rPr lang="he-IL" smtClean="0"/>
-              <a:t>כ"ז.אייר.תשפ"ו</a:t>
+              <a:t>ט'.סיון.תשפ"ו</a:t>
             </a:fld>
             <a:endParaRPr lang="he-IL"/>
           </a:p>
@@ -640,7 +640,7 @@
           <a:p>
             <a:fld id="{4E7438E1-117D-44FB-AC24-B79D899BA877}" type="datetimeFigureOut">
               <a:rPr lang="he-IL" smtClean="0"/>
-              <a:t>כ"ז.אייר.תשפ"ו</a:t>
+              <a:t>ט'.סיון.תשפ"ו</a:t>
             </a:fld>
             <a:endParaRPr lang="he-IL"/>
           </a:p>
@@ -803,7 +803,7 @@
           <a:p>
             <a:fld id="{4E7438E1-117D-44FB-AC24-B79D899BA877}" type="datetimeFigureOut">
               <a:rPr lang="he-IL" smtClean="0"/>
-              <a:t>כ"ז.אייר.תשפ"ו</a:t>
+              <a:t>ט'.סיון.תשפ"ו</a:t>
             </a:fld>
             <a:endParaRPr lang="he-IL"/>
           </a:p>
@@ -1043,7 +1043,7 @@
           <a:p>
             <a:fld id="{4E7438E1-117D-44FB-AC24-B79D899BA877}" type="datetimeFigureOut">
               <a:rPr lang="he-IL" smtClean="0"/>
-              <a:t>כ"ז.אייר.תשפ"ו</a:t>
+              <a:t>ט'.סיון.תשפ"ו</a:t>
             </a:fld>
             <a:endParaRPr lang="he-IL"/>
           </a:p>
@@ -1323,7 +1323,7 @@
           <a:p>
             <a:fld id="{4E7438E1-117D-44FB-AC24-B79D899BA877}" type="datetimeFigureOut">
               <a:rPr lang="he-IL" smtClean="0"/>
-              <a:t>כ"ז.אייר.תשפ"ו</a:t>
+              <a:t>ט'.סיון.תשפ"ו</a:t>
             </a:fld>
             <a:endParaRPr lang="he-IL"/>
           </a:p>
@@ -1737,7 +1737,7 @@
           <a:p>
             <a:fld id="{4E7438E1-117D-44FB-AC24-B79D899BA877}" type="datetimeFigureOut">
               <a:rPr lang="he-IL" smtClean="0"/>
-              <a:t>כ"ז.אייר.תשפ"ו</a:t>
+              <a:t>ט'.סיון.תשפ"ו</a:t>
             </a:fld>
             <a:endParaRPr lang="he-IL"/>
           </a:p>
@@ -1849,7 +1849,7 @@
           <a:p>
             <a:fld id="{4E7438E1-117D-44FB-AC24-B79D899BA877}" type="datetimeFigureOut">
               <a:rPr lang="he-IL" smtClean="0"/>
-              <a:t>כ"ז.אייר.תשפ"ו</a:t>
+              <a:t>ט'.סיון.תשפ"ו</a:t>
             </a:fld>
             <a:endParaRPr lang="he-IL"/>
           </a:p>
@@ -1939,7 +1939,7 @@
           <a:p>
             <a:fld id="{4E7438E1-117D-44FB-AC24-B79D899BA877}" type="datetimeFigureOut">
               <a:rPr lang="he-IL" smtClean="0"/>
-              <a:t>כ"ז.אייר.תשפ"ו</a:t>
+              <a:t>ט'.סיון.תשפ"ו</a:t>
             </a:fld>
             <a:endParaRPr lang="he-IL"/>
           </a:p>
@@ -2209,7 +2209,7 @@
           <a:p>
             <a:fld id="{4E7438E1-117D-44FB-AC24-B79D899BA877}" type="datetimeFigureOut">
               <a:rPr lang="he-IL" smtClean="0"/>
-              <a:t>כ"ז.אייר.תשפ"ו</a:t>
+              <a:t>ט'.סיון.תשפ"ו</a:t>
             </a:fld>
             <a:endParaRPr lang="he-IL"/>
           </a:p>
@@ -2456,7 +2456,7 @@
           <a:p>
             <a:fld id="{4E7438E1-117D-44FB-AC24-B79D899BA877}" type="datetimeFigureOut">
               <a:rPr lang="he-IL" smtClean="0"/>
-              <a:t>כ"ז.אייר.תשפ"ו</a:t>
+              <a:t>ט'.סיון.תשפ"ו</a:t>
             </a:fld>
             <a:endParaRPr lang="he-IL"/>
           </a:p>
@@ -2662,7 +2662,7 @@
           <a:p>
             <a:fld id="{4E7438E1-117D-44FB-AC24-B79D899BA877}" type="datetimeFigureOut">
               <a:rPr lang="he-IL" smtClean="0"/>
-              <a:t>כ"ז.אייר.תשפ"ו</a:t>
+              <a:t>ט'.סיון.תשפ"ו</a:t>
             </a:fld>
             <a:endParaRPr lang="he-IL"/>
           </a:p>
@@ -4288,7 +4288,7 @@
                 </a:pPr>
                 <a:r>
                   <a:rPr lang="en-US" sz="1800" dirty="0"/>
-                  <a:t>              Is the profile suspended/empty/private (no info)?</a:t>
+                  <a:t>              Is the profile suspended/empty/protected (no info)?</a:t>
                 </a:r>
                 <a:endParaRPr lang="he-IL" sz="1800" kern="600" dirty="0">
                   <a:solidFill>
